--- a/presentations/python_for_stem_intro.pptx
+++ b/presentations/python_for_stem_intro.pptx
@@ -5,7 +5,7 @@
     <p:sldMasterId id="2147483660" r:id="rId4"/>
   </p:sldMasterIdLst>
   <p:notesMasterIdLst>
-    <p:notesMasterId r:id="rId18"/>
+    <p:notesMasterId r:id="rId19"/>
   </p:notesMasterIdLst>
   <p:sldIdLst>
     <p:sldId id="256" r:id="rId5"/>
@@ -20,7 +20,8 @@
     <p:sldId id="267" r:id="rId14"/>
     <p:sldId id="271" r:id="rId15"/>
     <p:sldId id="272" r:id="rId16"/>
-    <p:sldId id="269" r:id="rId17"/>
+    <p:sldId id="277" r:id="rId17"/>
+    <p:sldId id="269" r:id="rId18"/>
   </p:sldIdLst>
   <p:sldSz cx="12192000" cy="6858000"/>
   <p:notesSz cx="6858000" cy="9144000"/>
@@ -570,7 +571,7 @@
           <a:p>
             <a:fld id="{D2A30A22-0E52-4664-9FF0-DE9764994645}" type="datetimeFigureOut">
               <a:rPr lang="en-US" smtClean="0"/>
-              <a:t>9/29/2026</a:t>
+              <a:t>9/30/2026</a:t>
             </a:fld>
             <a:endParaRPr lang="en-US"/>
           </a:p>
@@ -932,6 +933,90 @@
             <a:spLocks noGrp="1" noRot="1" noChangeAspect="1"/>
           </p:cNvSpPr>
           <p:nvPr>
+            <p:ph type="sldImg"/>
+          </p:nvPr>
+        </p:nvSpPr>
+        <p:spPr/>
+      </p:sp>
+      <p:sp>
+        <p:nvSpPr>
+          <p:cNvPr id="3" name="Notes Placeholder 2"/>
+          <p:cNvSpPr>
+            <a:spLocks noGrp="1"/>
+          </p:cNvSpPr>
+          <p:nvPr>
+            <p:ph type="body" idx="1"/>
+          </p:nvPr>
+        </p:nvSpPr>
+        <p:spPr/>
+        <p:txBody>
+          <a:bodyPr/>
+          <a:lstStyle/>
+          <a:p>
+            <a:endParaRPr lang="en-US" dirty="0"/>
+          </a:p>
+        </p:txBody>
+      </p:sp>
+      <p:sp>
+        <p:nvSpPr>
+          <p:cNvPr id="4" name="Slide Number Placeholder 3"/>
+          <p:cNvSpPr>
+            <a:spLocks noGrp="1"/>
+          </p:cNvSpPr>
+          <p:nvPr>
+            <p:ph type="sldNum" sz="quarter" idx="5"/>
+          </p:nvPr>
+        </p:nvSpPr>
+        <p:spPr/>
+        <p:txBody>
+          <a:bodyPr/>
+          <a:lstStyle/>
+          <a:p>
+            <a:fld id="{8A102FE4-B2C6-4A5D-987B-B596A422F141}" type="slidenum">
+              <a:rPr lang="en-US" smtClean="0"/>
+              <a:t>13</a:t>
+            </a:fld>
+            <a:endParaRPr lang="en-US"/>
+          </a:p>
+        </p:txBody>
+      </p:sp>
+    </p:spTree>
+    <p:extLst>
+      <p:ext uri="{BB962C8B-B14F-4D97-AF65-F5344CB8AC3E}">
+        <p14:creationId xmlns:p14="http://schemas.microsoft.com/office/powerpoint/2010/main" val="709586526"/>
+      </p:ext>
+    </p:extLst>
+  </p:cSld>
+  <p:clrMapOvr>
+    <a:masterClrMapping/>
+  </p:clrMapOvr>
+</p:notes>
+</file>
+
+<file path=ppt/notesSlides/notesSlide11.xml><?xml version="1.0" encoding="utf-8"?>
+<p:notes xmlns:a="http://schemas.openxmlformats.org/drawingml/2006/main" xmlns:r="http://schemas.openxmlformats.org/officeDocument/2006/relationships" xmlns:p="http://schemas.openxmlformats.org/presentationml/2006/main">
+  <p:cSld>
+    <p:spTree>
+      <p:nvGrpSpPr>
+        <p:cNvPr id="1" name=""/>
+        <p:cNvGrpSpPr/>
+        <p:nvPr/>
+      </p:nvGrpSpPr>
+      <p:grpSpPr>
+        <a:xfrm>
+          <a:off x="0" y="0"/>
+          <a:ext cx="0" cy="0"/>
+          <a:chOff x="0" y="0"/>
+          <a:chExt cx="0" cy="0"/>
+        </a:xfrm>
+      </p:grpSpPr>
+      <p:sp>
+        <p:nvSpPr>
+          <p:cNvPr id="2" name="Slide Image Placeholder 1"/>
+          <p:cNvSpPr>
+            <a:spLocks noGrp="1" noRot="1" noChangeAspect="1"/>
+          </p:cNvSpPr>
+          <p:nvPr>
             <p:ph type="sldImg" idx="2"/>
           </p:nvPr>
         </p:nvSpPr>
@@ -1779,7 +1864,7 @@
           <a:p>
             <a:fld id="{0723FCEA-C0B4-4F5B-BA35-49BA504B55AA}" type="datetimeFigureOut">
               <a:rPr lang="en-US" smtClean="0"/>
-              <a:t>9/29/2026</a:t>
+              <a:t>9/30/2026</a:t>
             </a:fld>
             <a:endParaRPr lang="en-US"/>
           </a:p>
@@ -2174,7 +2259,7 @@
             <a:fld id="{0723FCEA-C0B4-4F5B-BA35-49BA504B55AA}" type="datetimeFigureOut">
               <a:rPr lang="en-US" smtClean="0"/>
               <a:pPr/>
-              <a:t>9/29/2026</a:t>
+              <a:t>9/30/2026</a:t>
             </a:fld>
             <a:endParaRPr lang="en-US" dirty="0">
               <a:solidFill>
@@ -2519,7 +2604,7 @@
             <a:fld id="{0723FCEA-C0B4-4F5B-BA35-49BA504B55AA}" type="datetimeFigureOut">
               <a:rPr lang="en-US" smtClean="0"/>
               <a:pPr/>
-              <a:t>9/29/2026</a:t>
+              <a:t>9/30/2026</a:t>
             </a:fld>
             <a:endParaRPr lang="en-US" dirty="0">
               <a:solidFill>
@@ -2806,7 +2891,7 @@
           <a:p>
             <a:fld id="{F6BAC715-1898-4461-87D9-A24561B45713}" type="datetimeFigureOut">
               <a:rPr lang="en-DE" smtClean="0"/>
-              <a:t>09/29/2026</a:t>
+              <a:t>09/30/2026</a:t>
             </a:fld>
             <a:endParaRPr lang="en-DE"/>
           </a:p>
@@ -3103,7 +3188,7 @@
           <a:p>
             <a:fld id="{0723FCEA-C0B4-4F5B-BA35-49BA504B55AA}" type="datetimeFigureOut">
               <a:rPr lang="en-US" smtClean="0"/>
-              <a:t>9/29/2026</a:t>
+              <a:t>9/30/2026</a:t>
             </a:fld>
             <a:endParaRPr lang="en-US"/>
           </a:p>
@@ -3485,7 +3570,7 @@
             <a:fld id="{0723FCEA-C0B4-4F5B-BA35-49BA504B55AA}" type="datetimeFigureOut">
               <a:rPr lang="en-US" smtClean="0"/>
               <a:pPr/>
-              <a:t>9/29/2026</a:t>
+              <a:t>9/30/2026</a:t>
             </a:fld>
             <a:endParaRPr lang="en-US" dirty="0">
               <a:solidFill>
@@ -3946,7 +4031,7 @@
             <a:fld id="{0723FCEA-C0B4-4F5B-BA35-49BA504B55AA}" type="datetimeFigureOut">
               <a:rPr lang="en-US" smtClean="0"/>
               <a:pPr/>
-              <a:t>9/29/2026</a:t>
+              <a:t>9/30/2026</a:t>
             </a:fld>
             <a:endParaRPr lang="en-US" dirty="0"/>
           </a:p>
@@ -4571,7 +4656,7 @@
             <a:fld id="{0723FCEA-C0B4-4F5B-BA35-49BA504B55AA}" type="datetimeFigureOut">
               <a:rPr lang="en-US" smtClean="0"/>
               <a:pPr/>
-              <a:t>9/29/2026</a:t>
+              <a:t>9/30/2026</a:t>
             </a:fld>
             <a:endParaRPr lang="en-US" dirty="0">
               <a:solidFill>
@@ -4849,7 +4934,7 @@
             <a:fld id="{0723FCEA-C0B4-4F5B-BA35-49BA504B55AA}" type="datetimeFigureOut">
               <a:rPr lang="en-US" smtClean="0"/>
               <a:pPr/>
-              <a:t>9/29/2026</a:t>
+              <a:t>9/30/2026</a:t>
             </a:fld>
             <a:endParaRPr lang="en-US" dirty="0">
               <a:solidFill>
@@ -5084,7 +5169,7 @@
             <a:fld id="{0723FCEA-C0B4-4F5B-BA35-49BA504B55AA}" type="datetimeFigureOut">
               <a:rPr lang="en-US" smtClean="0"/>
               <a:pPr/>
-              <a:t>9/29/2026</a:t>
+              <a:t>9/30/2026</a:t>
             </a:fld>
             <a:endParaRPr lang="en-US" dirty="0">
               <a:solidFill>
@@ -5548,7 +5633,7 @@
             <a:fld id="{0723FCEA-C0B4-4F5B-BA35-49BA504B55AA}" type="datetimeFigureOut">
               <a:rPr lang="en-US" smtClean="0"/>
               <a:pPr/>
-              <a:t>9/29/2026</a:t>
+              <a:t>9/30/2026</a:t>
             </a:fld>
             <a:endParaRPr lang="en-US" dirty="0">
               <a:solidFill>
@@ -5973,7 +6058,7 @@
             <a:fld id="{0723FCEA-C0B4-4F5B-BA35-49BA504B55AA}" type="datetimeFigureOut">
               <a:rPr lang="en-US" smtClean="0"/>
               <a:pPr/>
-              <a:t>9/29/2026</a:t>
+              <a:t>9/30/2026</a:t>
             </a:fld>
             <a:endParaRPr lang="en-US" dirty="0"/>
           </a:p>
@@ -6271,7 +6356,7 @@
           <a:p>
             <a:fld id="{0723FCEA-C0B4-4F5B-BA35-49BA504B55AA}" type="datetimeFigureOut">
               <a:rPr lang="en-US" smtClean="0"/>
-              <a:t>9/29/2026</a:t>
+              <a:t>9/30/2026</a:t>
             </a:fld>
             <a:endParaRPr lang="en-US"/>
           </a:p>
@@ -7222,6 +7307,138 @@
   <p:cSld>
     <p:spTree>
       <p:nvGrpSpPr>
+        <p:cNvPr id="1" name="">
+          <a:extLst>
+            <a:ext uri="{FF2B5EF4-FFF2-40B4-BE49-F238E27FC236}">
+              <a16:creationId xmlns:a16="http://schemas.microsoft.com/office/drawing/2014/main" id="{A1B43118-8CE8-40A9-6D50-F1DF902857FC}"/>
+            </a:ext>
+          </a:extLst>
+        </p:cNvPr>
+        <p:cNvGrpSpPr/>
+        <p:nvPr/>
+      </p:nvGrpSpPr>
+      <p:grpSpPr>
+        <a:xfrm>
+          <a:off x="0" y="0"/>
+          <a:ext cx="0" cy="0"/>
+          <a:chOff x="0" y="0"/>
+          <a:chExt cx="0" cy="0"/>
+        </a:xfrm>
+      </p:grpSpPr>
+      <p:sp>
+        <p:nvSpPr>
+          <p:cNvPr id="4" name="Title 3">
+            <a:extLst>
+              <a:ext uri="{FF2B5EF4-FFF2-40B4-BE49-F238E27FC236}">
+                <a16:creationId xmlns:a16="http://schemas.microsoft.com/office/drawing/2014/main" id="{A349AF9D-2C58-710F-C0DE-F089CD6ADF9A}"/>
+              </a:ext>
+            </a:extLst>
+          </p:cNvPr>
+          <p:cNvSpPr>
+            <a:spLocks noGrp="1"/>
+          </p:cNvSpPr>
+          <p:nvPr>
+            <p:ph type="title"/>
+          </p:nvPr>
+        </p:nvSpPr>
+        <p:spPr/>
+        <p:txBody>
+          <a:bodyPr>
+            <a:normAutofit/>
+          </a:bodyPr>
+          <a:lstStyle/>
+          <a:p>
+            <a:r>
+              <a:rPr lang="en-US" dirty="0"/>
+              <a:t>Class Material</a:t>
+            </a:r>
+          </a:p>
+        </p:txBody>
+      </p:sp>
+      <p:sp>
+        <p:nvSpPr>
+          <p:cNvPr id="5" name="Content Placeholder 4">
+            <a:extLst>
+              <a:ext uri="{FF2B5EF4-FFF2-40B4-BE49-F238E27FC236}">
+                <a16:creationId xmlns:a16="http://schemas.microsoft.com/office/drawing/2014/main" id="{41D477C9-0DFF-57D5-D793-ED15E0AD0038}"/>
+              </a:ext>
+            </a:extLst>
+          </p:cNvPr>
+          <p:cNvSpPr>
+            <a:spLocks noGrp="1"/>
+          </p:cNvSpPr>
+          <p:nvPr>
+            <p:ph idx="1"/>
+          </p:nvPr>
+        </p:nvSpPr>
+        <p:spPr/>
+        <p:txBody>
+          <a:bodyPr>
+            <a:normAutofit/>
+          </a:bodyPr>
+          <a:lstStyle/>
+          <a:p>
+            <a:pPr marL="0" indent="0" algn="ctr">
+              <a:buNone/>
+            </a:pPr>
+            <a:endParaRPr lang="en-US" sz="4400" dirty="0">
+              <a:solidFill>
+                <a:srgbClr val="E89923"/>
+              </a:solidFill>
+              <a:latin typeface="Open Sans ExtraBold" panose="020B0906030804020204" pitchFamily="34" charset="0"/>
+              <a:ea typeface="Open Sans ExtraBold" panose="020B0906030804020204" pitchFamily="34" charset="0"/>
+              <a:cs typeface="Open Sans ExtraBold" panose="020B0906030804020204" pitchFamily="34" charset="0"/>
+            </a:endParaRPr>
+          </a:p>
+          <a:p>
+            <a:pPr marL="0" indent="0" algn="ctr">
+              <a:buNone/>
+            </a:pPr>
+            <a:endParaRPr lang="en-US" sz="4400" dirty="0">
+              <a:solidFill>
+                <a:srgbClr val="E89923"/>
+              </a:solidFill>
+              <a:latin typeface="Open Sans ExtraBold" panose="020B0906030804020204" pitchFamily="34" charset="0"/>
+              <a:ea typeface="Open Sans ExtraBold" panose="020B0906030804020204" pitchFamily="34" charset="0"/>
+              <a:cs typeface="Open Sans ExtraBold" panose="020B0906030804020204" pitchFamily="34" charset="0"/>
+            </a:endParaRPr>
+          </a:p>
+          <a:p>
+            <a:pPr marL="0" indent="0" algn="ctr">
+              <a:buNone/>
+            </a:pPr>
+            <a:r>
+              <a:rPr lang="en-US" sz="4000" dirty="0">
+                <a:solidFill>
+                  <a:srgbClr val="E89923"/>
+                </a:solidFill>
+                <a:latin typeface="Open Sans ExtraBold" panose="020B0906030804020204" pitchFamily="34" charset="0"/>
+                <a:ea typeface="Open Sans ExtraBold" panose="020B0906030804020204" pitchFamily="34" charset="0"/>
+                <a:cs typeface="Open Sans ExtraBold" panose="020B0906030804020204" pitchFamily="34" charset="0"/>
+              </a:rPr>
+              <a:t>github.com/janash/roots-python-stem</a:t>
+            </a:r>
+          </a:p>
+        </p:txBody>
+      </p:sp>
+    </p:spTree>
+    <p:extLst>
+      <p:ext uri="{BB962C8B-B14F-4D97-AF65-F5344CB8AC3E}">
+        <p14:creationId xmlns:p14="http://schemas.microsoft.com/office/powerpoint/2010/main" val="1746134124"/>
+      </p:ext>
+    </p:extLst>
+  </p:cSld>
+  <p:clrMapOvr>
+    <a:masterClrMapping/>
+  </p:clrMapOvr>
+</p:sld>
+</file>
+
+<file path=ppt/slides/slide14.xml><?xml version="1.0" encoding="utf-8"?>
+<p:sld xmlns:a="http://schemas.openxmlformats.org/drawingml/2006/main" xmlns:r="http://schemas.openxmlformats.org/officeDocument/2006/relationships" xmlns:p="http://schemas.openxmlformats.org/presentationml/2006/main">
+  <p:cSld>
+    <p:spTree>
+      <p:nvGrpSpPr>
         <p:cNvPr id="1" name=""/>
         <p:cNvGrpSpPr/>
         <p:nvPr/>
@@ -7802,11 +8019,17 @@
           <p:cNvGraphicFramePr>
             <a:graphicFrameLocks noGrp="1"/>
           </p:cNvGraphicFramePr>
-          <p:nvPr/>
+          <p:nvPr>
+            <p:extLst>
+              <p:ext uri="{D42A27DB-BD31-4B8C-83A1-F6EECF244321}">
+                <p14:modId xmlns:p14="http://schemas.microsoft.com/office/powerpoint/2010/main" val="622333002"/>
+              </p:ext>
+            </p:extLst>
+          </p:nvPr>
         </p:nvGraphicFramePr>
         <p:xfrm>
-          <a:off x="859536" y="1993392"/>
-          <a:ext cx="5943600" cy="3776472"/>
+          <a:off x="280578" y="1642181"/>
+          <a:ext cx="6806021" cy="4352892"/>
         </p:xfrm>
         <a:graphic>
           <a:graphicData uri="http://schemas.openxmlformats.org/drawingml/2006/chart">
@@ -8294,7 +8517,7 @@
         </p:blipFill>
         <p:spPr>
           <a:xfrm>
-            <a:off x="901834" y="1975104"/>
+            <a:off x="701998" y="1887760"/>
             <a:ext cx="5090907" cy="3319272"/>
           </a:xfrm>
           <a:prstGeom prst="rect">
@@ -10723,6 +10946,15 @@
 </file>
 
 <file path=customXml/item1.xml><?xml version="1.0" encoding="utf-8"?>
+<?mso-contentType ?>
+<FormTemplates xmlns="http://schemas.microsoft.com/sharepoint/v3/contenttype/forms">
+  <Display>DocumentLibraryForm</Display>
+  <Edit>DocumentLibraryForm</Edit>
+  <New>DocumentLibraryForm</New>
+</FormTemplates>
+</file>
+
+<file path=customXml/item2.xml><?xml version="1.0" encoding="utf-8"?>
 <ct:contentTypeSchema xmlns:ct="http://schemas.microsoft.com/office/2006/metadata/contentType" xmlns:ma="http://schemas.microsoft.com/office/2006/metadata/properties/metaAttributes" ct:_="" ma:_="" ma:contentTypeName="Document" ma:contentTypeID="0x010100E125EA46D57E5C408905BF1A8EB70A6F" ma:contentTypeVersion="2" ma:contentTypeDescription="Create a new document." ma:contentTypeScope="" ma:versionID="f92358e824178776e0b57490c57f1b59">
   <xsd:schema xmlns:xsd="http://www.w3.org/2001/XMLSchema" xmlns:xs="http://www.w3.org/2001/XMLSchema" xmlns:p="http://schemas.microsoft.com/office/2006/metadata/properties" xmlns:ns3="4662864e-4b4b-42f9-9e5d-d3db1108610a" targetNamespace="http://schemas.microsoft.com/office/2006/metadata/properties" ma:root="true" ma:fieldsID="61da21a4ca889725573de8ef20925a7e" ns3:_="">
     <xsd:import namespace="4662864e-4b4b-42f9-9e5d-d3db1108610a"/>
@@ -10854,15 +11086,6 @@
 </ct:contentTypeSchema>
 </file>
 
-<file path=customXml/item2.xml><?xml version="1.0" encoding="utf-8"?>
-<?mso-contentType ?>
-<FormTemplates xmlns="http://schemas.microsoft.com/sharepoint/v3/contenttype/forms">
-  <Display>DocumentLibraryForm</Display>
-  <Edit>DocumentLibraryForm</Edit>
-  <New>DocumentLibraryForm</New>
-</FormTemplates>
-</file>
-
 <file path=customXml/item3.xml><?xml version="1.0" encoding="utf-8"?>
 <p:properties xmlns:p="http://schemas.microsoft.com/office/2006/metadata/properties" xmlns:xsi="http://www.w3.org/2001/XMLSchema-instance" xmlns:pc="http://schemas.microsoft.com/office/infopath/2007/PartnerControls">
   <documentManagement>
@@ -10872,6 +11095,14 @@
 </file>
 
 <file path=customXml/itemProps1.xml><?xml version="1.0" encoding="utf-8"?>
+<ds:datastoreItem xmlns:ds="http://schemas.openxmlformats.org/officeDocument/2006/customXml" ds:itemID="{BFB3BAF6-B65A-4F8E-82A4-A9F0BABE6097}">
+  <ds:schemaRefs>
+    <ds:schemaRef ds:uri="http://schemas.microsoft.com/sharepoint/v3/contenttype/forms"/>
+  </ds:schemaRefs>
+</ds:datastoreItem>
+</file>
+
+<file path=customXml/itemProps2.xml><?xml version="1.0" encoding="utf-8"?>
 <ds:datastoreItem xmlns:ds="http://schemas.openxmlformats.org/officeDocument/2006/customXml" ds:itemID="{300A481F-EDE6-48A2-A20B-7F46E60A293B}">
   <ds:schemaRefs>
     <ds:schemaRef ds:uri="4662864e-4b4b-42f9-9e5d-d3db1108610a"/>
@@ -10885,14 +11116,6 @@
     <ds:schemaRef ds:uri="http://schemas.microsoft.com/office/infopath/2007/PartnerControls"/>
     <ds:schemaRef ds:uri="http://schemas.openxmlformats.org/package/2006/metadata/core-properties"/>
     <ds:schemaRef ds:uri="http://www.w3.org/2001/XMLSchema"/>
-  </ds:schemaRefs>
-</ds:datastoreItem>
-</file>
-
-<file path=customXml/itemProps2.xml><?xml version="1.0" encoding="utf-8"?>
-<ds:datastoreItem xmlns:ds="http://schemas.openxmlformats.org/officeDocument/2006/customXml" ds:itemID="{BFB3BAF6-B65A-4F8E-82A4-A9F0BABE6097}">
-  <ds:schemaRefs>
-    <ds:schemaRef ds:uri="http://schemas.microsoft.com/sharepoint/v3/contenttype/forms"/>
   </ds:schemaRefs>
 </ds:datastoreItem>
 </file>
